--- a/ゲーム科1年/01_後期/ゲーム制作実習Ⅰ/バージョン管理/03_Clone.pptx
+++ b/ゲーム科1年/01_後期/ゲーム制作実習Ⅰ/バージョン管理/03_Clone.pptx
@@ -266,7 +266,7 @@
           <a:p>
             <a:fld id="{E9CC885B-4903-4D54-9A93-00025F12DED9}" type="datetimeFigureOut">
               <a:rPr kumimoji="1" lang="ja-JP" altLang="en-US" smtClean="0"/>
-              <a:t>2026/1/14</a:t>
+              <a:t>2026/1/15</a:t>
             </a:fld>
             <a:endParaRPr kumimoji="1" lang="ja-JP" altLang="en-US"/>
           </a:p>
@@ -496,7 +496,7 @@
           <a:p>
             <a:fld id="{E9CC885B-4903-4D54-9A93-00025F12DED9}" type="datetimeFigureOut">
               <a:rPr kumimoji="1" lang="ja-JP" altLang="en-US" smtClean="0"/>
-              <a:t>2026/1/14</a:t>
+              <a:t>2026/1/15</a:t>
             </a:fld>
             <a:endParaRPr kumimoji="1" lang="ja-JP" altLang="en-US"/>
           </a:p>
@@ -736,7 +736,7 @@
           <a:p>
             <a:fld id="{E9CC885B-4903-4D54-9A93-00025F12DED9}" type="datetimeFigureOut">
               <a:rPr kumimoji="1" lang="ja-JP" altLang="en-US" smtClean="0"/>
-              <a:t>2026/1/14</a:t>
+              <a:t>2026/1/15</a:t>
             </a:fld>
             <a:endParaRPr kumimoji="1" lang="ja-JP" altLang="en-US"/>
           </a:p>
@@ -966,7 +966,7 @@
           <a:p>
             <a:fld id="{E9CC885B-4903-4D54-9A93-00025F12DED9}" type="datetimeFigureOut">
               <a:rPr kumimoji="1" lang="ja-JP" altLang="en-US" smtClean="0"/>
-              <a:t>2026/1/14</a:t>
+              <a:t>2026/1/15</a:t>
             </a:fld>
             <a:endParaRPr kumimoji="1" lang="ja-JP" altLang="en-US"/>
           </a:p>
@@ -1241,7 +1241,7 @@
           <a:p>
             <a:fld id="{E9CC885B-4903-4D54-9A93-00025F12DED9}" type="datetimeFigureOut">
               <a:rPr kumimoji="1" lang="ja-JP" altLang="en-US" smtClean="0"/>
-              <a:t>2026/1/14</a:t>
+              <a:t>2026/1/15</a:t>
             </a:fld>
             <a:endParaRPr kumimoji="1" lang="ja-JP" altLang="en-US"/>
           </a:p>
@@ -1570,7 +1570,7 @@
           <a:p>
             <a:fld id="{E9CC885B-4903-4D54-9A93-00025F12DED9}" type="datetimeFigureOut">
               <a:rPr kumimoji="1" lang="ja-JP" altLang="en-US" smtClean="0"/>
-              <a:t>2026/1/14</a:t>
+              <a:t>2026/1/15</a:t>
             </a:fld>
             <a:endParaRPr kumimoji="1" lang="ja-JP" altLang="en-US"/>
           </a:p>
@@ -2046,7 +2046,7 @@
           <a:p>
             <a:fld id="{E9CC885B-4903-4D54-9A93-00025F12DED9}" type="datetimeFigureOut">
               <a:rPr kumimoji="1" lang="ja-JP" altLang="en-US" smtClean="0"/>
-              <a:t>2026/1/14</a:t>
+              <a:t>2026/1/15</a:t>
             </a:fld>
             <a:endParaRPr kumimoji="1" lang="ja-JP" altLang="en-US"/>
           </a:p>
@@ -2187,7 +2187,7 @@
           <a:p>
             <a:fld id="{E9CC885B-4903-4D54-9A93-00025F12DED9}" type="datetimeFigureOut">
               <a:rPr kumimoji="1" lang="ja-JP" altLang="en-US" smtClean="0"/>
-              <a:t>2026/1/14</a:t>
+              <a:t>2026/1/15</a:t>
             </a:fld>
             <a:endParaRPr kumimoji="1" lang="ja-JP" altLang="en-US"/>
           </a:p>
@@ -2300,7 +2300,7 @@
           <a:p>
             <a:fld id="{E9CC885B-4903-4D54-9A93-00025F12DED9}" type="datetimeFigureOut">
               <a:rPr kumimoji="1" lang="ja-JP" altLang="en-US" smtClean="0"/>
-              <a:t>2026/1/14</a:t>
+              <a:t>2026/1/15</a:t>
             </a:fld>
             <a:endParaRPr kumimoji="1" lang="ja-JP" altLang="en-US"/>
           </a:p>
@@ -2643,7 +2643,7 @@
           <a:p>
             <a:fld id="{E9CC885B-4903-4D54-9A93-00025F12DED9}" type="datetimeFigureOut">
               <a:rPr kumimoji="1" lang="ja-JP" altLang="en-US" smtClean="0"/>
-              <a:t>2026/1/14</a:t>
+              <a:t>2026/1/15</a:t>
             </a:fld>
             <a:endParaRPr kumimoji="1" lang="ja-JP" altLang="en-US"/>
           </a:p>
@@ -2931,7 +2931,7 @@
           <a:p>
             <a:fld id="{E9CC885B-4903-4D54-9A93-00025F12DED9}" type="datetimeFigureOut">
               <a:rPr kumimoji="1" lang="ja-JP" altLang="en-US" smtClean="0"/>
-              <a:t>2026/1/14</a:t>
+              <a:t>2026/1/15</a:t>
             </a:fld>
             <a:endParaRPr kumimoji="1" lang="ja-JP" altLang="en-US"/>
           </a:p>
@@ -3204,7 +3204,7 @@
           <a:p>
             <a:fld id="{E9CC885B-4903-4D54-9A93-00025F12DED9}" type="datetimeFigureOut">
               <a:rPr kumimoji="1" lang="ja-JP" altLang="en-US" smtClean="0"/>
-              <a:t>2026/1/14</a:t>
+              <a:t>2026/1/15</a:t>
             </a:fld>
             <a:endParaRPr kumimoji="1" lang="ja-JP" altLang="en-US"/>
           </a:p>
@@ -3672,7 +3672,7 @@
         <p:spPr>
           <a:xfrm>
             <a:off x="567542" y="1216429"/>
-            <a:ext cx="11572399" cy="1569660"/>
+            <a:ext cx="10341293" cy="1569660"/>
           </a:xfrm>
           <a:prstGeom prst="rect">
             <a:avLst/>
@@ -3694,7 +3694,7 @@
           <a:p>
             <a:r>
               <a:rPr lang="ja-JP" altLang="en-US" sz="2400" dirty="0"/>
-              <a:t>そもそもリポジトリ作成とは、</a:t>
+              <a:t>そもそもリポジトリとは、</a:t>
             </a:r>
             <a:r>
               <a:rPr lang="ja-JP" altLang="en-US" sz="2400" b="1" dirty="0">
@@ -3702,16 +3702,19 @@
                   <a:srgbClr val="FF0000"/>
                 </a:solidFill>
               </a:rPr>
-              <a:t>サーバーに保存場所を作る</a:t>
-            </a:r>
+              <a:t>インターネット上のサーバーに保存場所を作る</a:t>
+            </a:r>
+            <a:endParaRPr lang="en-US" altLang="ja-JP" sz="2400" b="1" dirty="0">
+              <a:solidFill>
+                <a:srgbClr val="FF0000"/>
+              </a:solidFill>
+            </a:endParaRPr>
+          </a:p>
+          <a:p>
             <a:r>
               <a:rPr lang="ja-JP" altLang="en-US" sz="2400" dirty="0"/>
               <a:t>ようなものになります。</a:t>
             </a:r>
-            <a:endParaRPr lang="en-US" altLang="ja-JP" sz="2400" dirty="0"/>
-          </a:p>
-          <a:p>
-            <a:endParaRPr lang="en-US" altLang="ja-JP" sz="2400" dirty="0"/>
           </a:p>
           <a:p>
             <a:r>
@@ -3800,8 +3803,8 @@
         </p:nvSpPr>
         <p:spPr>
           <a:xfrm>
-            <a:off x="686446" y="3636899"/>
-            <a:ext cx="1901483" cy="369332"/>
+            <a:off x="567542" y="3634063"/>
+            <a:ext cx="2363147" cy="369332"/>
           </a:xfrm>
           <a:prstGeom prst="rect">
             <a:avLst/>
@@ -3828,7 +3831,7 @@
                   <a:srgbClr val="0070C0"/>
                 </a:solidFill>
               </a:rPr>
-              <a:t>サーバー</a:t>
+              <a:t>社のサーバー</a:t>
             </a:r>
             <a:endParaRPr lang="en-US" altLang="ja-JP" b="1" dirty="0">
               <a:solidFill>
@@ -3885,6 +3888,97 @@
           </a:extLst>
         </p:spPr>
       </p:pic>
+      <p:pic>
+        <p:nvPicPr>
+          <p:cNvPr id="7" name="Picture 2" descr="後ろから見たパソコンを使う人のイラスト（男性）">
+            <a:extLst>
+              <a:ext uri="{FF2B5EF4-FFF2-40B4-BE49-F238E27FC236}">
+                <a16:creationId xmlns:a16="http://schemas.microsoft.com/office/drawing/2014/main" id="{AE2E8626-B765-4248-B65B-A4042BC3E43E}"/>
+              </a:ext>
+            </a:extLst>
+          </p:cNvPr>
+          <p:cNvPicPr>
+            <a:picLocks noChangeAspect="1" noChangeArrowheads="1"/>
+          </p:cNvPicPr>
+          <p:nvPr/>
+        </p:nvPicPr>
+        <p:blipFill>
+          <a:blip r:embed="rId3">
+            <a:extLst>
+              <a:ext uri="{28A0092B-C50C-407E-A947-70E740481C1C}">
+                <a14:useLocalDpi xmlns:a14="http://schemas.microsoft.com/office/drawing/2010/main" val="0"/>
+              </a:ext>
+            </a:extLst>
+          </a:blip>
+          <a:srcRect/>
+          <a:stretch>
+            <a:fillRect/>
+          </a:stretch>
+        </p:blipFill>
+        <p:spPr bwMode="auto">
+          <a:xfrm>
+            <a:off x="5071788" y="3212445"/>
+            <a:ext cx="3810000" cy="3171825"/>
+          </a:xfrm>
+          <a:prstGeom prst="rect">
+            <a:avLst/>
+          </a:prstGeom>
+          <a:noFill/>
+          <a:extLst>
+            <a:ext uri="{909E8E84-426E-40DD-AFC4-6F175D3DCCD1}">
+              <a14:hiddenFill xmlns:a14="http://schemas.microsoft.com/office/drawing/2010/main">
+                <a:solidFill>
+                  <a:srgbClr val="FFFFFF"/>
+                </a:solidFill>
+              </a14:hiddenFill>
+            </a:ext>
+          </a:extLst>
+        </p:spPr>
+      </p:pic>
+      <p:sp>
+        <p:nvSpPr>
+          <p:cNvPr id="8" name="テキスト ボックス 7">
+            <a:extLst>
+              <a:ext uri="{FF2B5EF4-FFF2-40B4-BE49-F238E27FC236}">
+                <a16:creationId xmlns:a16="http://schemas.microsoft.com/office/drawing/2014/main" id="{BA6085BC-757D-4D52-8CA0-F06F814DE5DA}"/>
+              </a:ext>
+            </a:extLst>
+          </p:cNvPr>
+          <p:cNvSpPr txBox="1"/>
+          <p:nvPr/>
+        </p:nvSpPr>
+        <p:spPr>
+          <a:xfrm>
+            <a:off x="6216003" y="6084264"/>
+            <a:ext cx="1521570" cy="461665"/>
+          </a:xfrm>
+          <a:prstGeom prst="rect">
+            <a:avLst/>
+          </a:prstGeom>
+          <a:noFill/>
+        </p:spPr>
+        <p:txBody>
+          <a:bodyPr wrap="none" rtlCol="0">
+            <a:spAutoFit/>
+          </a:bodyPr>
+          <a:lstStyle/>
+          <a:p>
+            <a:r>
+              <a:rPr lang="ja-JP" altLang="en-US" sz="2400" dirty="0"/>
+              <a:t>学校の</a:t>
+            </a:r>
+            <a:r>
+              <a:rPr lang="en-US" altLang="ja-JP" sz="2400" dirty="0"/>
+              <a:t>PC</a:t>
+            </a:r>
+            <a:endParaRPr lang="en-US" altLang="ja-JP" sz="2400" b="1" dirty="0">
+              <a:solidFill>
+                <a:srgbClr val="FF0000"/>
+              </a:solidFill>
+            </a:endParaRPr>
+          </a:p>
+        </p:txBody>
+      </p:sp>
     </p:spTree>
     <p:extLst>
       <p:ext uri="{BB962C8B-B14F-4D97-AF65-F5344CB8AC3E}">
@@ -4836,7 +4930,7 @@
         <p:spPr>
           <a:xfrm>
             <a:off x="567542" y="1216429"/>
-            <a:ext cx="8802410" cy="461665"/>
+            <a:ext cx="11264622" cy="830997"/>
           </a:xfrm>
           <a:prstGeom prst="rect">
             <a:avLst/>
@@ -4851,7 +4945,14 @@
           <a:p>
             <a:r>
               <a:rPr lang="ja-JP" altLang="en-US" sz="2400" dirty="0"/>
-              <a:t>エクスプローラーで空のフォルダを作り、中に入りましょう。</a:t>
+              <a:t>授業用フォルダ（自分の名前フォルダ中にある授業用に整理してるフォルダ）に</a:t>
+            </a:r>
+            <a:endParaRPr lang="en-US" altLang="ja-JP" sz="2400" dirty="0"/>
+          </a:p>
+          <a:p>
+            <a:r>
+              <a:rPr lang="ja-JP" altLang="en-US" sz="2400" dirty="0"/>
+              <a:t>空のフォルダを作り、中に入りましょう。</a:t>
             </a:r>
             <a:endParaRPr lang="en-US" altLang="ja-JP" sz="2400" dirty="0"/>
           </a:p>
@@ -4879,7 +4980,7 @@
         </p:blipFill>
         <p:spPr>
           <a:xfrm>
-            <a:off x="567543" y="1817794"/>
+            <a:off x="567542" y="2301889"/>
             <a:ext cx="7052458" cy="3925336"/>
           </a:xfrm>
           <a:prstGeom prst="rect">
@@ -4887,73 +4988,6 @@
           </a:prstGeom>
         </p:spPr>
       </p:pic>
-      <p:sp>
-        <p:nvSpPr>
-          <p:cNvPr id="8" name="テキスト ボックス 7">
-            <a:extLst>
-              <a:ext uri="{FF2B5EF4-FFF2-40B4-BE49-F238E27FC236}">
-                <a16:creationId xmlns:a16="http://schemas.microsoft.com/office/drawing/2014/main" id="{78A46184-64F7-487F-9238-5174035AAC03}"/>
-              </a:ext>
-            </a:extLst>
-          </p:cNvPr>
-          <p:cNvSpPr txBox="1"/>
-          <p:nvPr/>
-        </p:nvSpPr>
-        <p:spPr>
-          <a:xfrm>
-            <a:off x="567542" y="5904381"/>
-            <a:ext cx="11572399" cy="830997"/>
-          </a:xfrm>
-          <a:prstGeom prst="rect">
-            <a:avLst/>
-          </a:prstGeom>
-          <a:noFill/>
-        </p:spPr>
-        <p:txBody>
-          <a:bodyPr wrap="none" rtlCol="0">
-            <a:spAutoFit/>
-          </a:bodyPr>
-          <a:lstStyle/>
-          <a:p>
-            <a:r>
-              <a:rPr lang="en-US" altLang="ja-JP" sz="2400" b="1" dirty="0">
-                <a:solidFill>
-                  <a:srgbClr val="FF0000"/>
-                </a:solidFill>
-              </a:rPr>
-              <a:t>※</a:t>
-            </a:r>
-            <a:r>
-              <a:rPr lang="ja-JP" altLang="en-US" sz="2400" b="1" dirty="0">
-                <a:solidFill>
-                  <a:srgbClr val="FF0000"/>
-                </a:solidFill>
-              </a:rPr>
-              <a:t>この場所にプロジェクトが保存されます</a:t>
-            </a:r>
-            <a:endParaRPr lang="en-US" altLang="ja-JP" sz="2400" b="1" dirty="0">
-              <a:solidFill>
-                <a:srgbClr val="FF0000"/>
-              </a:solidFill>
-            </a:endParaRPr>
-          </a:p>
-          <a:p>
-            <a:r>
-              <a:rPr lang="ja-JP" altLang="en-US" sz="2400" b="1" dirty="0">
-                <a:solidFill>
-                  <a:srgbClr val="FF0000"/>
-                </a:solidFill>
-              </a:rPr>
-              <a:t>　授業用フォルダ（自分の名前フォルダで整理してるやつ）に保存しましょう。</a:t>
-            </a:r>
-            <a:endParaRPr lang="en-US" altLang="ja-JP" sz="2400" b="1" dirty="0">
-              <a:solidFill>
-                <a:srgbClr val="FF0000"/>
-              </a:solidFill>
-            </a:endParaRPr>
-          </a:p>
-        </p:txBody>
-      </p:sp>
     </p:spTree>
     <p:extLst>
       <p:ext uri="{BB962C8B-B14F-4D97-AF65-F5344CB8AC3E}">
@@ -5317,12 +5351,52 @@
           </a:p>
         </p:txBody>
       </p:sp>
+      <p:sp>
+        <p:nvSpPr>
+          <p:cNvPr id="8" name="テキスト ボックス 7">
+            <a:extLst>
+              <a:ext uri="{FF2B5EF4-FFF2-40B4-BE49-F238E27FC236}">
+                <a16:creationId xmlns:a16="http://schemas.microsoft.com/office/drawing/2014/main" id="{BB946719-AB96-4887-AB3B-4A4026B5382E}"/>
+              </a:ext>
+            </a:extLst>
+          </p:cNvPr>
+          <p:cNvSpPr txBox="1"/>
+          <p:nvPr/>
+        </p:nvSpPr>
+        <p:spPr>
+          <a:xfrm>
+            <a:off x="567542" y="5756305"/>
+            <a:ext cx="7263527" cy="461665"/>
+          </a:xfrm>
+          <a:prstGeom prst="rect">
+            <a:avLst/>
+          </a:prstGeom>
+          <a:noFill/>
+        </p:spPr>
+        <p:txBody>
+          <a:bodyPr wrap="none" rtlCol="0">
+            <a:spAutoFit/>
+          </a:bodyPr>
+          <a:lstStyle/>
+          <a:p>
+            <a:r>
+              <a:rPr lang="en-US" altLang="ja-JP" sz="2400" dirty="0"/>
+              <a:t>※</a:t>
+            </a:r>
+            <a:r>
+              <a:rPr lang="ja-JP" altLang="en-US" sz="2400" dirty="0"/>
+              <a:t>サインインを促されたらサインインしましょう。</a:t>
+            </a:r>
+            <a:endParaRPr lang="en-US" altLang="ja-JP" sz="2400" dirty="0"/>
+          </a:p>
+        </p:txBody>
+      </p:sp>
       <p:pic>
         <p:nvPicPr>
-          <p:cNvPr id="5" name="図 4">
-            <a:extLst>
-              <a:ext uri="{FF2B5EF4-FFF2-40B4-BE49-F238E27FC236}">
-                <a16:creationId xmlns:a16="http://schemas.microsoft.com/office/drawing/2014/main" id="{A10E40D7-CDC3-407E-9ED0-DBD2D76F31B0}"/>
+          <p:cNvPr id="3" name="図 2">
+            <a:extLst>
+              <a:ext uri="{FF2B5EF4-FFF2-40B4-BE49-F238E27FC236}">
+                <a16:creationId xmlns:a16="http://schemas.microsoft.com/office/drawing/2014/main" id="{1ED2B38B-D2F9-4776-A1F4-7EEA4C030677}"/>
               </a:ext>
             </a:extLst>
           </p:cNvPr>
@@ -5339,54 +5413,14 @@
         </p:blipFill>
         <p:spPr>
           <a:xfrm>
-            <a:off x="567542" y="2187126"/>
-            <a:ext cx="5410955" cy="3429479"/>
+            <a:off x="567542" y="2139494"/>
+            <a:ext cx="5534797" cy="3524742"/>
           </a:xfrm>
           <a:prstGeom prst="rect">
             <a:avLst/>
           </a:prstGeom>
         </p:spPr>
       </p:pic>
-      <p:sp>
-        <p:nvSpPr>
-          <p:cNvPr id="8" name="テキスト ボックス 7">
-            <a:extLst>
-              <a:ext uri="{FF2B5EF4-FFF2-40B4-BE49-F238E27FC236}">
-                <a16:creationId xmlns:a16="http://schemas.microsoft.com/office/drawing/2014/main" id="{BB946719-AB96-4887-AB3B-4A4026B5382E}"/>
-              </a:ext>
-            </a:extLst>
-          </p:cNvPr>
-          <p:cNvSpPr txBox="1"/>
-          <p:nvPr/>
-        </p:nvSpPr>
-        <p:spPr>
-          <a:xfrm>
-            <a:off x="567542" y="5756305"/>
-            <a:ext cx="7263527" cy="461665"/>
-          </a:xfrm>
-          <a:prstGeom prst="rect">
-            <a:avLst/>
-          </a:prstGeom>
-          <a:noFill/>
-        </p:spPr>
-        <p:txBody>
-          <a:bodyPr wrap="none" rtlCol="0">
-            <a:spAutoFit/>
-          </a:bodyPr>
-          <a:lstStyle/>
-          <a:p>
-            <a:r>
-              <a:rPr lang="en-US" altLang="ja-JP" sz="2400" dirty="0"/>
-              <a:t>※</a:t>
-            </a:r>
-            <a:r>
-              <a:rPr lang="ja-JP" altLang="en-US" sz="2400" dirty="0"/>
-              <a:t>サインインを促されたらサインインしましょう。</a:t>
-            </a:r>
-            <a:endParaRPr lang="en-US" altLang="ja-JP" sz="2400" dirty="0"/>
-          </a:p>
-        </p:txBody>
-      </p:sp>
     </p:spTree>
     <p:extLst>
       <p:ext uri="{BB962C8B-B14F-4D97-AF65-F5344CB8AC3E}">
